--- a/media/resources/files/Ekvivalenettuuluk_BOP_KazynaIzdoo.pptx
+++ b/media/resources/files/Ekvivalenettuuluk_BOP_KazynaIzdoo.pptx
@@ -22392,7 +22392,7 @@
                 <a:ea typeface="+mn-ea"/>
                 <a:cs typeface="+mn-cs"/>
               </a:rPr>
-              <a:t>Турдуу пикирлер учун ыраазычылык билдиребиз.</a:t>
+              <a:t>Түрдүү пикирлер үчүн ыраазычылык билдиребиз.</a:t>
             </a:r>
           </a:p>
           <a:p>

--- a/media/resources/files/Ekvivalenettuuluk_BOP_KazynaIzdoo.pptx
+++ b/media/resources/files/Ekvivalenettuuluk_BOP_KazynaIzdoo.pptx
@@ -4464,7 +4464,7 @@
           <a:p>
             <a:r>
               <a:rPr lang="ky-KG" sz="3200" dirty="0"/>
-              <a:t>Берилген бөлчөктү ,пайызга айландыр.</a:t>
+              <a:t>Берилген бөлчөктү,пайызга айландыр.</a:t>
             </a:r>
             <a:endParaRPr lang="en-GB" sz="3200" dirty="0"/>
           </a:p>
@@ -5138,7 +5138,7 @@
           <a:p>
             <a:r>
               <a:rPr lang="ky-KG" sz="3200" dirty="0"/>
-              <a:t>Берилген бөлчөктү ,ондукка айландыр.</a:t>
+              <a:t>Берилген бөлчөктү,ондукка айландыр.</a:t>
             </a:r>
             <a:endParaRPr lang="en-GB" sz="3200" dirty="0"/>
           </a:p>
@@ -9697,7 +9697,7 @@
           <a:p>
             <a:r>
               <a:rPr lang="ky-KG" sz="3200" dirty="0"/>
-              <a:t>Берилген бөлчөктү ,ондукка айландыр.</a:t>
+              <a:t>Берилген бөлчөктү,ондукка айландыр.</a:t>
             </a:r>
             <a:endParaRPr lang="en-GB" sz="3200" dirty="0"/>
           </a:p>
@@ -10680,7 +10680,7 @@
                               <a:ea typeface="+mn-ea"/>
                               <a:cs typeface="+mn-cs"/>
                             </a:rPr>
-                            <a:t>0.65</a:t>
+                            <a:t>0,65</a:t>
                           </a:r>
                         </a:p>
                       </a:txBody>
@@ -11693,7 +11693,7 @@
                               <a:ea typeface="+mn-ea"/>
                               <a:cs typeface="+mn-cs"/>
                             </a:rPr>
-                            <a:t>0.15</a:t>
+                            <a:t>0,15</a:t>
                           </a:r>
                         </a:p>
                       </a:txBody>
@@ -12298,7 +12298,7 @@
                               <a:ea typeface="+mn-ea"/>
                               <a:cs typeface="+mn-cs"/>
                             </a:rPr>
-                            <a:t>0.8</a:t>
+                            <a:t>0,8</a:t>
                           </a:r>
                         </a:p>
                       </a:txBody>
@@ -14219,7 +14219,7 @@
                               <a:ea typeface="+mn-ea"/>
                               <a:cs typeface="+mn-cs"/>
                             </a:rPr>
-                            <a:t>0.65</a:t>
+                            <a:t>0,65</a:t>
                           </a:r>
                         </a:p>
                       </a:txBody>
@@ -14991,7 +14991,7 @@
                               <a:ea typeface="+mn-ea"/>
                               <a:cs typeface="+mn-cs"/>
                             </a:rPr>
-                            <a:t>0.15</a:t>
+                            <a:t>0,15</a:t>
                           </a:r>
                         </a:p>
                       </a:txBody>
@@ -15391,7 +15391,7 @@
                               <a:ea typeface="+mn-ea"/>
                               <a:cs typeface="+mn-cs"/>
                             </a:rPr>
-                            <a:t>0.8</a:t>
+                            <a:t>0,8</a:t>
                           </a:r>
                         </a:p>
                       </a:txBody>
@@ -24961,7 +24961,7 @@
           <a:p>
             <a:r>
               <a:rPr lang="ky-KG" sz="3200" dirty="0"/>
-              <a:t>Берилген ондукту ,бөлчөккө айландыр.</a:t>
+              <a:t>Берилген ондукту,бөлчөккө айландыр.</a:t>
             </a:r>
             <a:endParaRPr lang="en-GB" sz="3200" dirty="0"/>
           </a:p>
